--- a/assets/pptx/catalog-156.pptx
+++ b/assets/pptx/catalog-156.pptx
@@ -3427,7 +3427,7 @@
                 <a:ea typeface="Ebrima"/>
                 <a:cs typeface="Ebrima"/>
               </a:rPr>
-              <a:t>ላያወሳው ላይደግምብኝ (2x)</a:t>
+              <a:t>ላያወሳው ላይደግምብኝ 2x</a:t>
             </a:r>
           </a:p>
         </p:txBody>
@@ -3566,7 +3566,7 @@
                 <a:ea typeface="Ebrima"/>
                 <a:cs typeface="Ebrima"/>
               </a:rPr>
-              <a:t>ይቅር ይላል ፈውሶ (2x)</a:t>
+              <a:t>ይቅር ይላል ፈውሶ 2x</a:t>
             </a:r>
           </a:p>
         </p:txBody>
@@ -3947,7 +3947,7 @@
                 <a:ea typeface="Ebrima"/>
                 <a:cs typeface="Ebrima"/>
               </a:rPr>
-              <a:t>ይቅር ይላል ፈውሶ (2x)</a:t>
+              <a:t>ይቅር ይላል ፈውሶ 2x</a:t>
             </a:r>
           </a:p>
         </p:txBody>
@@ -4189,7 +4189,7 @@
                 <a:ea typeface="Ebrima"/>
                 <a:cs typeface="Ebrima"/>
               </a:rPr>
-              <a:t>ላያወሳው ላይደግምብኝ (2x)</a:t>
+              <a:t>ላያወሳው ላይደግምብኝ 2x</a:t>
             </a:r>
           </a:p>
         </p:txBody>
@@ -4328,7 +4328,7 @@
                 <a:ea typeface="Ebrima"/>
                 <a:cs typeface="Ebrima"/>
               </a:rPr>
-              <a:t>ይቅር ይላል ፈውሶ (2x)</a:t>
+              <a:t>ይቅር ይላል ፈውሶ 2x</a:t>
             </a:r>
           </a:p>
         </p:txBody>
@@ -4570,7 +4570,7 @@
                 <a:ea typeface="Ebrima"/>
                 <a:cs typeface="Ebrima"/>
               </a:rPr>
-              <a:t>ላያወሳው ላይደግምብኝ (2x)</a:t>
+              <a:t>ላያወሳው ላይደግምብኝ 2x</a:t>
             </a:r>
           </a:p>
         </p:txBody>
@@ -4709,7 +4709,7 @@
                 <a:ea typeface="Ebrima"/>
                 <a:cs typeface="Ebrima"/>
               </a:rPr>
-              <a:t>ይቅር ይላል ፈውሶ (2x)</a:t>
+              <a:t>ይቅር ይላል ፈውሶ 2x</a:t>
             </a:r>
           </a:p>
         </p:txBody>
